--- a/public/blog/presentations/semi-truck-accident-in-denver-colorado-what-to-do-2026.pptx
+++ b/public/blog/presentations/semi-truck-accident-in-denver-colorado-what-to-do-2026.pptx
@@ -515,7 +515,7 @@
           <a:lstStyle/>
           <a:p>
             <a:r>
-              <a:t>Educational presentation for Semi Truck Accident in Denver, Colorado: What to Do (2026). Full guide: https://www.wreckmatch.com/blog/semi-truck-accident-in-denver-colorado-what-to-do-2026. WreckMatch LLC legal referral service, not a law firm. WreckMatch LLC — legal referral service, not a law firm. Educational only. 800+ participating law firms. Call 855 WRECKMATCH. Reviewed for legal context by Judge Roy Waddell.</a:t>
+              <a:t>Educational presentation for Semi Truck Accident in Denver, Colorado: What to Do (2026). Full guide: https://www.wreckmatch.com/blog/semi-truck-accident-in-denver-colorado-what-to-do-2026. WreckMatch LLC legal referral service, not a law firm. WreckMatch LLC — legal referral service, not a law firm. Educational only. 800+ participating law firms. Call 855 WRECKMATCH. Reviewed for legal context by Hon. Ret. Judge Roy Waddell.</a:t>
             </a:r>
           </a:p>
         </p:txBody>
@@ -592,7 +592,7 @@
           <a:p/>
           <a:p>
             <a:r>
-              <a:t>Reviewed for legal context by Judge Roy Waddell, Legal Advisor at WreckMatch LLC — courtroom and procedural perspective only; not legal advice for your specific case.</a:t>
+              <a:t>Reviewed for legal context by Hon. Ret. Judge Roy Waddell, Legal Advisor at WreckMatch LLC — courtroom and procedural perspective only; not legal advice for your specific case.</a:t>
             </a:r>
           </a:p>
           <a:p/>
@@ -607,7 +607,7 @@
           <a:p/>
           <a:p>
             <a:r>
-              <a:t>At a glance: Colorado fast facts: 2-year statute of limitations · Modified 50% fault rule · 25/50/15 minimum auto liability insurance. WreckMatch LLC — legal referral service, not a law firm. Educational only. 800+ participating law firms. Call 855 WRECKMATCH. Reviewed for legal context by Judge Roy Waddell.</a:t>
+              <a:t>At a glance: Colorado fast facts: 2-year statute of limitations · Modified 50% fault rule · 25/50/15 minimum auto liability insurance. WreckMatch LLC — legal referral service, not a law firm. Educational only. 800+ participating law firms. Call 855 WRECKMATCH. Reviewed for legal context by Hon. Ret. Judge Roy Waddell.</a:t>
             </a:r>
           </a:p>
         </p:txBody>
@@ -689,7 +689,7 @@
           <a:p/>
           <a:p>
             <a:r>
-              <a:t>Colorado is an at-fault state. The at-fault driver's liability insurance is the primary source of recovery, and you can pursue compensation for medical bills, lost wages, and pain and suffering once liab WreckMatch LLC — legal referral service, not a law firm. Educational only. 800+ participating law firms. Call 855 WRECKMATCH. Reviewed for legal context by Judge Roy Waddell.</a:t>
+              <a:t>Colorado is an at-fault state. The at-fault driver's liability insurance is the primary source of recovery, and you can pursue compensation for medical bills, lost wages, and pain and suffering once liab WreckMatch LLC — legal referral service, not a law firm. Educational only. 800+ participating law firms. Call 855 WRECKMATCH. Reviewed for legal context by Hon. Ret. Judge Roy Waddell.</a:t>
             </a:r>
           </a:p>
         </p:txBody>
@@ -759,7 +759,7 @@
           <a:lstStyle/>
           <a:p>
             <a:r>
-              <a:t>Frequently asked questions WreckMatch LLC — legal referral service, not a law firm. Educational only. 800+ participating law firms. Call 855 WRECKMATCH. Reviewed for legal context by Judge Roy Waddell.</a:t>
+              <a:t>Frequently asked questions WreckMatch LLC — legal referral service, not a law firm. Educational only. 800+ participating law firms. Call 855 WRECKMATCH. Reviewed for legal context by Hon. Ret. Judge Roy Waddell.</a:t>
             </a:r>
           </a:p>
         </p:txBody>
@@ -829,7 +829,7 @@
           <a:lstStyle/>
           <a:p>
             <a:r>
-              <a:t>Get matched with a licensed attorney WreckMatch LLC — legal referral service, not a law firm. Educational only. 800+ participating law firms. Call 855 WRECKMATCH. Reviewed for legal context by Judge Roy Waddell.</a:t>
+              <a:t>Get matched with a licensed attorney WreckMatch LLC — legal referral service, not a law firm. Educational only. 800+ participating law firms. Call 855 WRECKMATCH. Reviewed for legal context by Hon. Ret. Judge Roy Waddell.</a:t>
             </a:r>
           </a:p>
         </p:txBody>
@@ -899,7 +899,7 @@
           <a:lstStyle/>
           <a:p>
             <a:r>
-              <a:t>Reviewed for legal context WreckMatch LLC — legal referral service, not a law firm. Educational only. 800+ participating law firms. Call 855 WRECKMATCH. Reviewed for legal context by Judge Roy Waddell.</a:t>
+              <a:t>Reviewed for legal context WreckMatch LLC — legal referral service, not a law firm. Educational only. 800+ participating law firms. Call 855 WRECKMATCH. Reviewed for legal context by Hon. Ret. Judge Roy Waddell.</a:t>
             </a:r>
           </a:p>
         </p:txBody>
@@ -969,7 +969,7 @@
           <a:lstStyle/>
           <a:p>
             <a:r>
-              <a:t>Important — read first WreckMatch LLC — legal referral service, not a law firm. Educational only. 800+ participating law firms. Call 855 WRECKMATCH. Reviewed for legal context by Judge Roy Waddell.</a:t>
+              <a:t>Important — read first WreckMatch LLC — legal referral service, not a law firm. Educational only. 800+ participating law firms. Call 855 WRECKMATCH. Reviewed for legal context by Hon. Ret. Judge Roy Waddell.</a:t>
             </a:r>
           </a:p>
         </p:txBody>
@@ -1039,7 +1039,7 @@
           <a:lstStyle/>
           <a:p>
             <a:r>
-              <a:t>After a semi truck or crash in Denver, Colorado, call 911, get medical care, preserve evidence including ECM/black box and carrier IDs, avoid recorded insurer statements, and use free attorney matching before signing anything. WreckMatch LLC — legal referral service, not a law firm. Educational only. 800+ participating law firms. Call 855 WRECKMATCH. Reviewed for legal context by Judge Roy Waddell.</a:t>
+              <a:t>After a semi truck or crash in Denver, Colorado, call 911, get medical care, preserve evidence including ECM/black box and carrier IDs, avoid recorded insurer statements, and use free attorney matching before signing anything. WreckMatch LLC — legal referral service, not a law firm. Educational only. 800+ participating law firms. Call 855 WRECKMATCH. Reviewed for legal context by Hon. Ret. Judge Roy Waddell.</a:t>
             </a:r>
           </a:p>
         </p:txBody>
@@ -1115,7 +1115,7 @@
           <a:p/>
           <a:p>
             <a:r>
-              <a:t>When you are ready, we connect you with licensed counsel in about 60 seconds. WreckMatch is a referral service, not a law firm. WreckMatch LLC — legal referral service, not a law firm. Educational only. 800+ participating law firms. Call 855 WRECKMATCH. Reviewed for legal context by Judge Roy Waddell.</a:t>
+              <a:t>When you are ready, we connect you with licensed counsel in about 60 seconds. WreckMatch is a referral service, not a law firm. WreckMatch LLC — legal referral service, not a law firm. Educational only. 800+ participating law firms. Call 855 WRECKMATCH. Reviewed for legal context by Hon. Ret. Judge Roy Waddell.</a:t>
             </a:r>
           </a:p>
         </p:txBody>
@@ -1210,7 +1210,7 @@
           </a:p>
           <a:p>
             <a:r>
-              <a:t>6. Get matched with a lawyer → WreckMatch LLC — legal referral service, not a law firm. Educational only. 800+ participating law firms. Call 855 WRECKMATCH. Reviewed for legal context by Judge Roy Waddell.</a:t>
+              <a:t>6. Get matched with a lawyer → WreckMatch LLC — legal referral service, not a law firm. Educational only. 800+ participating law firms. Call 855 WRECKMATCH. Reviewed for legal context by Hon. Ret. Judge Roy Waddell.</a:t>
             </a:r>
           </a:p>
         </p:txBody>
@@ -1311,7 +1311,7 @@
           <a:p/>
           <a:p>
             <a:r>
-              <a:t>Direct answer: Truck cases often involve multiple defendants (driver, motor carrier, broker, shipper). Your attorney may send spoliation letters immediately so electronic data is preserved. WreckMatch LLC — legal referral service, not a law firm. Educational only. 800+ participating law firms. Call 855 WRECKMATCH. Reviewed for legal context by Judge Roy Waddell.</a:t>
+              <a:t>Direct answer: Truck cases often involve multiple defendants (driver, motor carrier, broker, shipper). Your attorney may send spoliation letters immediately so electronic data is preserved. WreckMatch LLC — legal referral service, not a law firm. Educational only. 800+ participating law firms. Call 855 WRECKMATCH. Reviewed for legal context by Hon. Ret. Judge Roy Waddell.</a:t>
             </a:r>
           </a:p>
         </p:txBody>
@@ -1407,7 +1407,7 @@
           <a:p/>
           <a:p>
             <a:r>
-              <a:t>Insurers track filing deadlines closely. Missing a notice period can end a claim even when injuries are catastrophic. WreckMatch LLC — legal referral service, not a law firm. Educational only. 800+ participating law firms. Call 855 WRECKMATCH. Reviewed for legal context by Judge Roy Waddell.</a:t>
+              <a:t>Insurers track filing deadlines closely. Missing a notice period can end a claim even when injuries are catastrophic. WreckMatch LLC — legal referral service, not a law firm. Educational only. 800+ participating law firms. Call 855 WRECKMATCH. Reviewed for legal context by Hon. Ret. Judge Roy Waddell.</a:t>
             </a:r>
           </a:p>
         </p:txBody>
@@ -1492,7 +1492,7 @@
           </a:p>
           <a:p>
             <a:r>
-              <a:t>- Multiple policies pointing blame at each other (especially in truck and multi-vehicle crashes) WreckMatch LLC — legal referral service, not a law firm. Educational only. 800+ participating law firms. Call 855 WRECKMATCH. Reviewed for legal context by Judge Roy Waddell.</a:t>
+              <a:t>- Multiple policies pointing blame at each other (especially in truck and multi-vehicle crashes) WreckMatch LLC — legal referral service, not a law firm. Educational only. 800+ participating law firms. Call 855 WRECKMATCH. Reviewed for legal context by Hon. Ret. Judge Roy Waddell.</a:t>
             </a:r>
           </a:p>
         </p:txBody>
@@ -1562,7 +1562,7 @@
           <a:lstStyle/>
           <a:p>
             <a:r>
-              <a:t>Consider a free consultation if: hospitalization occurred, fault is disputed, a commercial truck was involved, a death occurred, or an insurer already denied coverage. WreckMatch connects you with participating licensed attorneys — we do not provide legal advice ourselves. WreckMatch LLC — legal referral service, not a law firm. Educational only. 800+ participating law firms. Call 855 WRECKMATCH. Reviewed for legal context by Judge Roy Waddell.</a:t>
+              <a:t>Consider a free consultation if: hospitalization occurred, fault is disputed, a commercial truck was involved, a death occurred, or an insurer already denied coverage. WreckMatch connects you with participating licensed attorneys — we do not provide legal advice ourselves. WreckMatch LLC — legal referral service, not a law firm. Educational only. 800+ participating law firms. Call 855 WRECKMATCH. Reviewed for legal context by Hon. Ret. Judge Roy Waddell.</a:t>
             </a:r>
           </a:p>
         </p:txBody>
@@ -4656,7 +4656,7 @@
               </a:defRPr>
             </a:pPr>
             <a:r>
-              <a:t>Truck Accidents · Colorado · 2026-05-28</a:t>
+              <a:t>Truck Accidents · Colorado · 2026-05-31</a:t>
             </a:r>
           </a:p>
         </p:txBody>
